--- a/docs/sales-kickoff/Roots_Saljkickoff.pptx
+++ b/docs/sales-kickoff/Roots_Saljkickoff.pptx
@@ -1,6 +1,6 @@
 
 <file path=ppt/presentation.xml><?xml version="1.0" encoding="utf-8"?>
-<p:presentation xmlns:a="http://schemas.openxmlformats.org/drawingml/2006/main" xmlns:r="http://schemas.openxmlformats.org/officeDocument/2006/relationships" xmlns:p="http://schemas.openxmlformats.org/presentationml/2006/main" saveSubsetFonts="1" autoCompressPictures="0">
+<p:presentation xmlns:a="http://schemas.openxmlformats.org/drawingml/2006/main" xmlns:r="http://schemas.openxmlformats.org/officeDocument/2006/relationships" xmlns:p="http://schemas.openxmlformats.org/presentationml/2006/main" saveSubsetFonts="0" autoCompressPictures="0" embedTrueTypeFonts="1">
   <p:sldMasterIdLst>
     <p:sldMasterId id="2147483648" r:id="rId1"/>
   </p:sldMasterIdLst>
@@ -46,6 +46,19 @@
   </p:sldIdLst>
   <p:sldSz cx="12191695" cy="6858000" type="screen4x3"/>
   <p:notesSz cx="6858000" cy="9144000"/>
+  <p:embeddedFontLst>
+    <p:embeddedFont>
+      <p:font typeface="Alan Sans"/>
+      <p:regular r:id="rIdEmbFont1"/>
+      <p:bold r:id="rIdEmbFont2"/>
+    </p:embeddedFont>
+    <p:embeddedFont>
+      <p:font typeface="Inter 18pt"/>
+      <p:regular r:id="rIdEmbFont3"/>
+      <p:bold r:id="rIdEmbFont4"/>
+      <p:italic r:id="rIdEmbFont5"/>
+    </p:embeddedFont>
+  </p:embeddedFontLst>
   <p:defaultTextStyle>
     <a:defPPr>
       <a:defRPr lang="en-US"/>
@@ -3135,7 +3148,7 @@
       <p:grpSpPr/>
       <p:pic>
         <p:nvPicPr>
-          <p:cNvPr id="2" name="Picture 1" descr="images__h1desktop.jpg"/>
+          <p:cNvPr id="2" name="Picture 1" descr="images__collection-2.jpg"/>
           <p:cNvPicPr>
             <a:picLocks noChangeAspect="1"/>
           </p:cNvPicPr>
@@ -3143,7 +3156,7 @@
         </p:nvPicPr>
         <p:blipFill>
           <a:blip r:embed="rId2"/>
-          <a:srcRect l="24802" r="24802"/>
+          <a:srcRect l="24957" r="24957"/>
           <a:stretch>
             <a:fillRect/>
           </a:stretch>
@@ -8419,7 +8432,7 @@
       </p:sp>
       <p:pic>
         <p:nvPicPr>
-          <p:cNvPr id="6" name="Picture 5" descr="images__p1.jpg"/>
+          <p:cNvPr id="6" name="Picture 5" descr="images__schampoo.jpg"/>
           <p:cNvPicPr>
             <a:picLocks noChangeAspect="1"/>
           </p:cNvPicPr>
@@ -8427,7 +8440,7 @@
         </p:nvPicPr>
         <p:blipFill>
           <a:blip r:embed="rId2"/>
-          <a:srcRect t="32551" b="32551"/>
+          <a:srcRect t="14947" b="14947"/>
           <a:stretch>
             <a:fillRect/>
           </a:stretch>
@@ -8527,7 +8540,7 @@
                 </a:solidFill>
                 <a:latin typeface="Alan Sans"/>
               </a:rPr>
-              <a:t>First Growth</a:t>
+              <a:t>Roots Schampoo</a:t>
             </a:r>
           </a:p>
         </p:txBody>
@@ -8625,7 +8638,7 @@
       </p:sp>
       <p:pic>
         <p:nvPicPr>
-          <p:cNvPr id="11" name="Picture 10" descr="images__p3.jpg"/>
+          <p:cNvPr id="11" name="Picture 10" descr="images__conditioner.jpg"/>
           <p:cNvPicPr>
             <a:picLocks noChangeAspect="1"/>
           </p:cNvPicPr>
@@ -8633,7 +8646,7 @@
         </p:nvPicPr>
         <p:blipFill>
           <a:blip r:embed="rId3"/>
-          <a:srcRect t="32551" b="32551"/>
+          <a:srcRect t="14947" b="14947"/>
           <a:stretch>
             <a:fillRect/>
           </a:stretch>
@@ -8733,7 +8746,7 @@
                 </a:solidFill>
                 <a:latin typeface="Alan Sans"/>
               </a:rPr>
-              <a:t>Pure Root</a:t>
+              <a:t>Roots Conditioner</a:t>
             </a:r>
           </a:p>
         </p:txBody>
@@ -8831,7 +8844,7 @@
       </p:sp>
       <p:pic>
         <p:nvPicPr>
-          <p:cNvPr id="16" name="Picture 15" descr="images__p4.jpg"/>
+          <p:cNvPr id="16" name="Picture 15" descr="images__body-wash.jpg"/>
           <p:cNvPicPr>
             <a:picLocks noChangeAspect="1"/>
           </p:cNvPicPr>
@@ -8839,7 +8852,7 @@
         </p:nvPicPr>
         <p:blipFill>
           <a:blip r:embed="rId4"/>
-          <a:srcRect t="26631" b="26631"/>
+          <a:srcRect t="14947" b="14947"/>
           <a:stretch>
             <a:fillRect/>
           </a:stretch>
@@ -8939,7 +8952,7 @@
                 </a:solidFill>
                 <a:latin typeface="Alan Sans"/>
               </a:rPr>
-              <a:t>Soft Rinse</a:t>
+              <a:t>Roots Body Wash</a:t>
             </a:r>
           </a:p>
         </p:txBody>
